--- a/nguyên lý máy.pptx
+++ b/nguyên lý máy.pptx
@@ -270,7 +270,7 @@
           <a:p>
             <a:fld id="{F7F4D771-082F-44C5-A7E7-8255A5B60C3F}" type="datetimeFigureOut">
               <a:rPr lang="en-US" smtClean="0"/>
-              <a:t>10/26/2026</a:t>
+              <a:t>10/30/2026</a:t>
             </a:fld>
             <a:endParaRPr lang="en-US"/>
           </a:p>
@@ -468,7 +468,7 @@
           <a:p>
             <a:fld id="{F7F4D771-082F-44C5-A7E7-8255A5B60C3F}" type="datetimeFigureOut">
               <a:rPr lang="en-US" smtClean="0"/>
-              <a:t>10/26/2026</a:t>
+              <a:t>10/30/2026</a:t>
             </a:fld>
             <a:endParaRPr lang="en-US"/>
           </a:p>
@@ -676,7 +676,7 @@
           <a:p>
             <a:fld id="{F7F4D771-082F-44C5-A7E7-8255A5B60C3F}" type="datetimeFigureOut">
               <a:rPr lang="en-US" smtClean="0"/>
-              <a:t>10/26/2026</a:t>
+              <a:t>10/30/2026</a:t>
             </a:fld>
             <a:endParaRPr lang="en-US"/>
           </a:p>
@@ -874,7 +874,7 @@
           <a:p>
             <a:fld id="{F7F4D771-082F-44C5-A7E7-8255A5B60C3F}" type="datetimeFigureOut">
               <a:rPr lang="en-US" smtClean="0"/>
-              <a:t>10/26/2026</a:t>
+              <a:t>10/30/2026</a:t>
             </a:fld>
             <a:endParaRPr lang="en-US"/>
           </a:p>
@@ -1149,7 +1149,7 @@
           <a:p>
             <a:fld id="{F7F4D771-082F-44C5-A7E7-8255A5B60C3F}" type="datetimeFigureOut">
               <a:rPr lang="en-US" smtClean="0"/>
-              <a:t>10/26/2026</a:t>
+              <a:t>10/30/2026</a:t>
             </a:fld>
             <a:endParaRPr lang="en-US"/>
           </a:p>
@@ -1414,7 +1414,7 @@
           <a:p>
             <a:fld id="{F7F4D771-082F-44C5-A7E7-8255A5B60C3F}" type="datetimeFigureOut">
               <a:rPr lang="en-US" smtClean="0"/>
-              <a:t>10/26/2026</a:t>
+              <a:t>10/30/2026</a:t>
             </a:fld>
             <a:endParaRPr lang="en-US"/>
           </a:p>
@@ -1826,7 +1826,7 @@
           <a:p>
             <a:fld id="{F7F4D771-082F-44C5-A7E7-8255A5B60C3F}" type="datetimeFigureOut">
               <a:rPr lang="en-US" smtClean="0"/>
-              <a:t>10/26/2026</a:t>
+              <a:t>10/30/2026</a:t>
             </a:fld>
             <a:endParaRPr lang="en-US"/>
           </a:p>
@@ -1967,7 +1967,7 @@
           <a:p>
             <a:fld id="{F7F4D771-082F-44C5-A7E7-8255A5B60C3F}" type="datetimeFigureOut">
               <a:rPr lang="en-US" smtClean="0"/>
-              <a:t>10/26/2026</a:t>
+              <a:t>10/30/2026</a:t>
             </a:fld>
             <a:endParaRPr lang="en-US"/>
           </a:p>
@@ -2080,7 +2080,7 @@
           <a:p>
             <a:fld id="{F7F4D771-082F-44C5-A7E7-8255A5B60C3F}" type="datetimeFigureOut">
               <a:rPr lang="en-US" smtClean="0"/>
-              <a:t>10/26/2026</a:t>
+              <a:t>10/30/2026</a:t>
             </a:fld>
             <a:endParaRPr lang="en-US"/>
           </a:p>
@@ -2391,7 +2391,7 @@
           <a:p>
             <a:fld id="{F7F4D771-082F-44C5-A7E7-8255A5B60C3F}" type="datetimeFigureOut">
               <a:rPr lang="en-US" smtClean="0"/>
-              <a:t>10/26/2026</a:t>
+              <a:t>10/30/2026</a:t>
             </a:fld>
             <a:endParaRPr lang="en-US"/>
           </a:p>
@@ -2679,7 +2679,7 @@
           <a:p>
             <a:fld id="{F7F4D771-082F-44C5-A7E7-8255A5B60C3F}" type="datetimeFigureOut">
               <a:rPr lang="en-US" smtClean="0"/>
-              <a:t>10/26/2026</a:t>
+              <a:t>10/30/2026</a:t>
             </a:fld>
             <a:endParaRPr lang="en-US"/>
           </a:p>
@@ -2920,7 +2920,7 @@
           <a:p>
             <a:fld id="{F7F4D771-082F-44C5-A7E7-8255A5B60C3F}" type="datetimeFigureOut">
               <a:rPr lang="en-US" smtClean="0"/>
-              <a:t>10/26/2026</a:t>
+              <a:t>10/30/2026</a:t>
             </a:fld>
             <a:endParaRPr lang="en-US"/>
           </a:p>
@@ -3581,7 +3581,7 @@
         <p:spPr>
           <a:xfrm>
             <a:off x="4160018" y="2743200"/>
-            <a:ext cx="4853353" cy="3046988"/>
+            <a:ext cx="4853353" cy="2554545"/>
           </a:xfrm>
           <a:prstGeom prst="rect">
             <a:avLst/>
@@ -3617,22 +3617,15 @@
               <a:t>Vũ Anh Đức</a:t>
             </a:r>
             <a:br>
+              <a:rPr lang="en-US" sz="3200"/>
+            </a:br>
+            <a:r>
+              <a:rPr lang="en-US" sz="3200"/>
+              <a:t>Lê </a:t>
+            </a:r>
+            <a:r>
               <a:rPr lang="en-US" sz="3200" dirty="0"/>
-            </a:br>
-            <a:r>
-              <a:rPr lang="en-US" sz="3200" dirty="0"/>
-              <a:t>Vũ Văn </a:t>
-            </a:r>
-            <a:r>
-              <a:rPr lang="en-US" sz="3200" dirty="0" err="1"/>
-              <a:t>Nhân</a:t>
-            </a:r>
-            <a:endParaRPr lang="en-US" sz="3200" dirty="0"/>
-          </a:p>
-          <a:p>
-            <a:r>
-              <a:rPr lang="en-US" sz="3200" dirty="0"/>
-              <a:t>Lê Văn Quyền</a:t>
+              <a:t>Văn Quyền</a:t>
             </a:r>
             <a:br>
               <a:rPr lang="en-US" sz="3200" dirty="0"/>
